--- a/2-seances/S02-premier-contact/a-projeter/quiz-seance-1.pptx
+++ b/2-seances/S02-premier-contact/a-projeter/quiz-seance-1.pptx
@@ -2733,7 +2733,7 @@
           <a:p>
             <a:r>
               <a:rPr lang="en-US" dirty="0"/>
-              <a:t>Enchaîner tout de suite sur la clôture : badges, Mur de Mission, post-it. Il est 13 h 55.</a:t>
+              <a:t>Il est 12 h 40. On enchaîne tout de suite sur la méthode de travail, puis la pause : à 13 h, les machines.</a:t>
             </a:r>
             <a:endParaRPr lang="en-US" dirty="0"/>
           </a:p>
@@ -3883,7 +3883,7 @@
                 <a:ea typeface="Calibri" pitchFamily="34" charset="-122"/>
                 <a:cs typeface="Calibri" pitchFamily="34" charset="-120"/>
               </a:rPr>
-              <a:t>SÉANCE 1  ·  LE DÉCOLLAGE</a:t>
+              <a:t>RÉVISION  ·  SÉANCE 1</a:t>
             </a:r>
             <a:endParaRPr lang="en-US" sz="1600" dirty="0"/>
           </a:p>
@@ -3961,7 +3961,7 @@
                 <a:ea typeface="Calibri" pitchFamily="34" charset="-122"/>
                 <a:cs typeface="Calibri" pitchFamily="34" charset="-120"/>
               </a:rPr>
-              <a:t>15 questions. Ce n'est pas une note : c'est un jeu.</a:t>
+              <a:t>Ce qu'on a vu samedi dernier. 15 questions, et ce n'est pas une note.</a:t>
             </a:r>
             <a:endParaRPr lang="en-US" sz="2400" dirty="0"/>
           </a:p>
@@ -4344,22 +4344,22 @@
           <a:p>
             <a:pPr algn="ctr" indent="0" marL="0">
               <a:lnSpc>
-                <a:spcPts val="4800"/>
+                <a:spcPts val="4200"/>
               </a:lnSpc>
               <a:buNone/>
             </a:pPr>
             <a:r>
-              <a:rPr lang="en-US" sz="4200" b="1" dirty="0">
-                <a:solidFill>
-                  <a:srgbClr val="FFFFFF"/>
-                </a:solidFill>
-                <a:latin typeface="Calibri" pitchFamily="34" charset="0"/>
-                <a:ea typeface="Calibri" pitchFamily="34" charset="-122"/>
-                <a:cs typeface="Calibri" pitchFamily="34" charset="-120"/>
-              </a:rPr>
-              <a:t>Un algorithme, c'est…</a:t>
-            </a:r>
-            <a:endParaRPr lang="en-US" sz="4200" dirty="0"/>
+              <a:rPr lang="en-US" sz="3600" b="1" dirty="0">
+                <a:solidFill>
+                  <a:srgbClr val="FFFFFF"/>
+                </a:solidFill>
+                <a:latin typeface="Calibri" pitchFamily="34" charset="0"/>
+                <a:ea typeface="Calibri" pitchFamily="34" charset="-122"/>
+                <a:cs typeface="Calibri" pitchFamily="34" charset="-120"/>
+              </a:rPr>
+              <a:t>Comment s'appelle le logiciel dans lequel on écrit notre code ?</a:t>
+            </a:r>
+            <a:endParaRPr lang="en-US" sz="3600" dirty="0"/>
           </a:p>
         </p:txBody>
       </p:sp>
@@ -4460,7 +4460,7 @@
                 <a:ea typeface="Calibri" pitchFamily="34" charset="-122"/>
                 <a:cs typeface="Calibri" pitchFamily="34" charset="-120"/>
               </a:rPr>
-              <a:t>Un ordinateur très rapide</a:t>
+              <a:t>Python</a:t>
             </a:r>
             <a:endParaRPr lang="en-US" sz="2300" dirty="0"/>
           </a:p>
@@ -4555,17 +4555,17 @@
               <a:buNone/>
             </a:pPr>
             <a:r>
-              <a:rPr lang="en-US" sz="1900" b="1" dirty="0">
-                <a:solidFill>
-                  <a:srgbClr val="FFFFFF"/>
-                </a:solidFill>
-                <a:latin typeface="Calibri" pitchFamily="34" charset="0"/>
-                <a:ea typeface="Calibri" pitchFamily="34" charset="-122"/>
-                <a:cs typeface="Calibri" pitchFamily="34" charset="-120"/>
-              </a:rPr>
-              <a:t>Une suite d'ordres précis, dans le bon ordre</a:t>
-            </a:r>
-            <a:endParaRPr lang="en-US" sz="1900" dirty="0"/>
+              <a:rPr lang="en-US" sz="2300" b="1" dirty="0">
+                <a:solidFill>
+                  <a:srgbClr val="FFFFFF"/>
+                </a:solidFill>
+                <a:latin typeface="Calibri" pitchFamily="34" charset="0"/>
+                <a:ea typeface="Calibri" pitchFamily="34" charset="-122"/>
+                <a:cs typeface="Calibri" pitchFamily="34" charset="-120"/>
+              </a:rPr>
+              <a:t>Thonny</a:t>
+            </a:r>
+            <a:endParaRPr lang="en-US" sz="2300" dirty="0"/>
           </a:p>
         </p:txBody>
       </p:sp>
@@ -4658,17 +4658,17 @@
               <a:buNone/>
             </a:pPr>
             <a:r>
-              <a:rPr lang="en-US" sz="1900" b="1" dirty="0">
-                <a:solidFill>
-                  <a:srgbClr val="FFFFFF"/>
-                </a:solidFill>
-                <a:latin typeface="Calibri" pitchFamily="34" charset="0"/>
-                <a:ea typeface="Calibri" pitchFamily="34" charset="-122"/>
-                <a:cs typeface="Calibri" pitchFamily="34" charset="-120"/>
-              </a:rPr>
-              <a:t>Un langage de programmation</a:t>
-            </a:r>
-            <a:endParaRPr lang="en-US" sz="1900" dirty="0"/>
+              <a:rPr lang="en-US" sz="2300" b="1" dirty="0">
+                <a:solidFill>
+                  <a:srgbClr val="FFFFFF"/>
+                </a:solidFill>
+                <a:latin typeface="Calibri" pitchFamily="34" charset="0"/>
+                <a:ea typeface="Calibri" pitchFamily="34" charset="-122"/>
+                <a:cs typeface="Calibri" pitchFamily="34" charset="-120"/>
+              </a:rPr>
+              <a:t>Kahoot</a:t>
+            </a:r>
+            <a:endParaRPr lang="en-US" sz="2300" dirty="0"/>
           </a:p>
         </p:txBody>
       </p:sp>
@@ -4769,7 +4769,7 @@
                 <a:ea typeface="Calibri" pitchFamily="34" charset="-122"/>
                 <a:cs typeface="Calibri" pitchFamily="34" charset="-120"/>
               </a:rPr>
-              <a:t>Un robot</a:t>
+              <a:t>Windows</a:t>
             </a:r>
             <a:endParaRPr lang="en-US" sz="2300" dirty="0"/>
           </a:p>
@@ -4879,7 +4879,7 @@
                 <a:ea typeface="Calibri" pitchFamily="34" charset="-122"/>
                 <a:cs typeface="Calibri" pitchFamily="34" charset="-120"/>
               </a:rPr>
-              <a:t>Un algorithme, c'est…</a:t>
+              <a:t>Comment s'appelle le logiciel dans lequel on écrit notre code ?</a:t>
             </a:r>
             <a:endParaRPr lang="en-US" sz="2200" dirty="0"/>
           </a:p>
@@ -4971,17 +4971,17 @@
               <a:buNone/>
             </a:pPr>
             <a:r>
-              <a:rPr lang="en-US" sz="3000" b="1" dirty="0">
-                <a:solidFill>
-                  <a:srgbClr val="FFFFFF"/>
-                </a:solidFill>
-                <a:latin typeface="Calibri" pitchFamily="34" charset="0"/>
-                <a:ea typeface="Calibri" pitchFamily="34" charset="-122"/>
-                <a:cs typeface="Calibri" pitchFamily="34" charset="-120"/>
-              </a:rPr>
-              <a:t>Une suite d'ordres précis, dans le bon ordre</a:t>
-            </a:r>
-            <a:endParaRPr lang="en-US" sz="3000" dirty="0"/>
+              <a:rPr lang="en-US" sz="3600" b="1" dirty="0">
+                <a:solidFill>
+                  <a:srgbClr val="FFFFFF"/>
+                </a:solidFill>
+                <a:latin typeface="Calibri" pitchFamily="34" charset="0"/>
+                <a:ea typeface="Calibri" pitchFamily="34" charset="-122"/>
+                <a:cs typeface="Calibri" pitchFamily="34" charset="-120"/>
+              </a:rPr>
+              <a:t>Thonny</a:t>
+            </a:r>
+            <a:endParaRPr lang="en-US" sz="3600" dirty="0"/>
           </a:p>
         </p:txBody>
       </p:sp>
@@ -5121,7 +5121,7 @@
                 <a:ea typeface="Calibri" pitchFamily="34" charset="-122"/>
                 <a:cs typeface="Calibri" pitchFamily="34" charset="-120"/>
               </a:rPr>
-              <a:t>C'est ce que vous avez fait avec le robot humain. Et une recette de cuisine en est un.</a:t>
+              <a:t>Python est la LANGUE. Thonny est la FEUILLE, avec le bouton vas-y.</a:t>
             </a:r>
             <a:endParaRPr lang="en-US" sz="2000" dirty="0"/>
           </a:p>
@@ -6176,22 +6176,22 @@
           <a:p>
             <a:pPr algn="ctr" indent="0" marL="0">
               <a:lnSpc>
-                <a:spcPts val="4200"/>
+                <a:spcPts val="4800"/>
               </a:lnSpc>
               <a:buNone/>
             </a:pPr>
             <a:r>
-              <a:rPr lang="en-US" sz="3600" b="1" dirty="0">
-                <a:solidFill>
-                  <a:srgbClr val="FFFFFF"/>
-                </a:solidFill>
-                <a:latin typeface="Calibri" pitchFamily="34" charset="0"/>
-                <a:ea typeface="Calibri" pitchFamily="34" charset="-122"/>
-                <a:cs typeface="Calibri" pitchFamily="34" charset="-120"/>
-              </a:rPr>
-              <a:t>Qui a écrit la première version de Facebook dans sa chambre d'étudiant ?</a:t>
-            </a:r>
-            <a:endParaRPr lang="en-US" sz="3600" dirty="0"/>
+              <a:rPr lang="en-US" sz="4200" b="1" dirty="0">
+                <a:solidFill>
+                  <a:srgbClr val="FFFFFF"/>
+                </a:solidFill>
+                <a:latin typeface="Calibri" pitchFamily="34" charset="0"/>
+                <a:ea typeface="Calibri" pitchFamily="34" charset="-122"/>
+                <a:cs typeface="Calibri" pitchFamily="34" charset="-120"/>
+              </a:rPr>
+              <a:t>L'ordinateur est surtout…</a:t>
+            </a:r>
+            <a:endParaRPr lang="en-US" sz="4200" dirty="0"/>
           </a:p>
         </p:txBody>
       </p:sp>
@@ -6292,7 +6292,7 @@
                 <a:ea typeface="Calibri" pitchFamily="34" charset="-122"/>
                 <a:cs typeface="Calibri" pitchFamily="34" charset="-120"/>
               </a:rPr>
-              <a:t>Mark Zuckerberg</a:t>
+              <a:t>Intelligent</a:t>
             </a:r>
             <a:endParaRPr lang="en-US" sz="2300" dirty="0"/>
           </a:p>
@@ -6395,7 +6395,7 @@
                 <a:ea typeface="Calibri" pitchFamily="34" charset="-122"/>
                 <a:cs typeface="Calibri" pitchFamily="34" charset="-120"/>
               </a:rPr>
-              <a:t>Elon Musk</a:t>
+              <a:t>Obéissant</a:t>
             </a:r>
             <a:endParaRPr lang="en-US" sz="2300" dirty="0"/>
           </a:p>
@@ -6498,7 +6498,7 @@
                 <a:ea typeface="Calibri" pitchFamily="34" charset="-122"/>
                 <a:cs typeface="Calibri" pitchFamily="34" charset="-120"/>
               </a:rPr>
-              <a:t>Guido van Rossum</a:t>
+              <a:t>Paresseux</a:t>
             </a:r>
             <a:endParaRPr lang="en-US" sz="2300" dirty="0"/>
           </a:p>
@@ -6601,7 +6601,7 @@
                 <a:ea typeface="Calibri" pitchFamily="34" charset="-122"/>
                 <a:cs typeface="Calibri" pitchFamily="34" charset="-120"/>
               </a:rPr>
-              <a:t>Nick D'Aloisio</a:t>
+              <a:t>Magique</a:t>
             </a:r>
             <a:endParaRPr lang="en-US" sz="2300" dirty="0"/>
           </a:p>
@@ -6711,7 +6711,7 @@
                 <a:ea typeface="Calibri" pitchFamily="34" charset="-122"/>
                 <a:cs typeface="Calibri" pitchFamily="34" charset="-120"/>
               </a:rPr>
-              <a:t>Qui a écrit la première version de Facebook dans sa chambre d'étudiant ?</a:t>
+              <a:t>L'ordinateur est surtout…</a:t>
             </a:r>
             <a:endParaRPr lang="en-US" sz="2200" dirty="0"/>
           </a:p>
@@ -6734,7 +6734,7 @@
             </a:avLst>
           </a:prstGeom>
           <a:solidFill>
-            <a:srgbClr val="D7262B"/>
+            <a:srgbClr val="1F6FD0"/>
           </a:solidFill>
           <a:ln/>
         </p:spPr>
@@ -6772,7 +6772,7 @@
                 <a:ea typeface="Calibri" pitchFamily="34" charset="-122"/>
                 <a:cs typeface="Calibri" pitchFamily="34" charset="-120"/>
               </a:rPr>
-              <a:t>▲   ROUGE</a:t>
+              <a:t>◆   BLEU</a:t>
             </a:r>
             <a:endParaRPr lang="en-US" sz="1500" dirty="0"/>
           </a:p>
@@ -6811,7 +6811,7 @@
                 <a:ea typeface="Calibri" pitchFamily="34" charset="-122"/>
                 <a:cs typeface="Calibri" pitchFamily="34" charset="-120"/>
               </a:rPr>
-              <a:t>Mark Zuckerberg</a:t>
+              <a:t>Obéissant</a:t>
             </a:r>
             <a:endParaRPr lang="en-US" sz="3600" dirty="0"/>
           </a:p>
@@ -6953,7 +6953,7 @@
                 <a:ea typeface="Calibri" pitchFamily="34" charset="-122"/>
                 <a:cs typeface="Calibri" pitchFamily="34" charset="-120"/>
               </a:rPr>
-              <a:t>À 19 ans. Mais il avait commencé à coder vers 12 ans, avec des programmes minuscules.</a:t>
+              <a:t>Il fait exactement ce qui est écrit. S'il fait une bêtise, ce n'est pas lui qui s'est trompé.</a:t>
             </a:r>
             <a:endParaRPr lang="en-US" sz="2000" dirty="0"/>
           </a:p>
@@ -7105,7 +7105,7 @@
                 <a:ea typeface="Calibri" pitchFamily="34" charset="-122"/>
                 <a:cs typeface="Calibri" pitchFamily="34" charset="-120"/>
               </a:rPr>
-              <a:t>D'où vient le mot « bug » ?</a:t>
+              <a:t>Un algorithme, c'est…</a:t>
             </a:r>
             <a:endParaRPr lang="en-US" sz="4200" dirty="0"/>
           </a:p>
@@ -7200,17 +7200,17 @@
               <a:buNone/>
             </a:pPr>
             <a:r>
-              <a:rPr lang="en-US" sz="1900" b="1" dirty="0">
-                <a:solidFill>
-                  <a:srgbClr val="FFFFFF"/>
-                </a:solidFill>
-                <a:latin typeface="Calibri" pitchFamily="34" charset="0"/>
-                <a:ea typeface="Calibri" pitchFamily="34" charset="-122"/>
-                <a:cs typeface="Calibri" pitchFamily="34" charset="-120"/>
-              </a:rPr>
-              <a:t>D'un vrai insecte coincé dans une machine</a:t>
-            </a:r>
-            <a:endParaRPr lang="en-US" sz="1900" dirty="0"/>
+              <a:rPr lang="en-US" sz="2300" b="1" dirty="0">
+                <a:solidFill>
+                  <a:srgbClr val="FFFFFF"/>
+                </a:solidFill>
+                <a:latin typeface="Calibri" pitchFamily="34" charset="0"/>
+                <a:ea typeface="Calibri" pitchFamily="34" charset="-122"/>
+                <a:cs typeface="Calibri" pitchFamily="34" charset="-120"/>
+              </a:rPr>
+              <a:t>Un ordinateur très rapide</a:t>
+            </a:r>
+            <a:endParaRPr lang="en-US" sz="2300" dirty="0"/>
           </a:p>
         </p:txBody>
       </p:sp>
@@ -7311,7 +7311,7 @@
                 <a:ea typeface="Calibri" pitchFamily="34" charset="-122"/>
                 <a:cs typeface="Calibri" pitchFamily="34" charset="-120"/>
               </a:rPr>
-              <a:t>D'un mot anglais qui veut dire erreur</a:t>
+              <a:t>Une suite d'ordres précis, dans le bon ordre</a:t>
             </a:r>
             <a:endParaRPr lang="en-US" sz="1900" dirty="0"/>
           </a:p>
@@ -7406,17 +7406,17 @@
               <a:buNone/>
             </a:pPr>
             <a:r>
-              <a:rPr lang="en-US" sz="2300" b="1" dirty="0">
-                <a:solidFill>
-                  <a:srgbClr val="FFFFFF"/>
-                </a:solidFill>
-                <a:latin typeface="Calibri" pitchFamily="34" charset="0"/>
-                <a:ea typeface="Calibri" pitchFamily="34" charset="-122"/>
-                <a:cs typeface="Calibri" pitchFamily="34" charset="-120"/>
-              </a:rPr>
-              <a:t>Du nom d'un ordinateur</a:t>
-            </a:r>
-            <a:endParaRPr lang="en-US" sz="2300" dirty="0"/>
+              <a:rPr lang="en-US" sz="1900" b="1" dirty="0">
+                <a:solidFill>
+                  <a:srgbClr val="FFFFFF"/>
+                </a:solidFill>
+                <a:latin typeface="Calibri" pitchFamily="34" charset="0"/>
+                <a:ea typeface="Calibri" pitchFamily="34" charset="-122"/>
+                <a:cs typeface="Calibri" pitchFamily="34" charset="-120"/>
+              </a:rPr>
+              <a:t>Un langage de programmation</a:t>
+            </a:r>
+            <a:endParaRPr lang="en-US" sz="1900" dirty="0"/>
           </a:p>
         </p:txBody>
       </p:sp>
@@ -7517,7 +7517,7 @@
                 <a:ea typeface="Calibri" pitchFamily="34" charset="-122"/>
                 <a:cs typeface="Calibri" pitchFamily="34" charset="-120"/>
               </a:rPr>
-              <a:t>D'un jeu vidéo</a:t>
+              <a:t>Un robot</a:t>
             </a:r>
             <a:endParaRPr lang="en-US" sz="2300" dirty="0"/>
           </a:p>
@@ -7627,7 +7627,7 @@
                 <a:ea typeface="Calibri" pitchFamily="34" charset="-122"/>
                 <a:cs typeface="Calibri" pitchFamily="34" charset="-120"/>
               </a:rPr>
-              <a:t>D'où vient le mot « bug » ?</a:t>
+              <a:t>Un algorithme, c'est…</a:t>
             </a:r>
             <a:endParaRPr lang="en-US" sz="2200" dirty="0"/>
           </a:p>
@@ -7650,7 +7650,7 @@
             </a:avLst>
           </a:prstGeom>
           <a:solidFill>
-            <a:srgbClr val="D7262B"/>
+            <a:srgbClr val="1F6FD0"/>
           </a:solidFill>
           <a:ln/>
         </p:spPr>
@@ -7688,7 +7688,7 @@
                 <a:ea typeface="Calibri" pitchFamily="34" charset="-122"/>
                 <a:cs typeface="Calibri" pitchFamily="34" charset="-120"/>
               </a:rPr>
-              <a:t>▲   ROUGE</a:t>
+              <a:t>◆   BLEU</a:t>
             </a:r>
             <a:endParaRPr lang="en-US" sz="1500" dirty="0"/>
           </a:p>
@@ -7727,7 +7727,7 @@
                 <a:ea typeface="Calibri" pitchFamily="34" charset="-122"/>
                 <a:cs typeface="Calibri" pitchFamily="34" charset="-120"/>
               </a:rPr>
-              <a:t>D'un vrai insecte coincé dans une machine</a:t>
+              <a:t>Une suite d'ordres précis, dans le bon ordre</a:t>
             </a:r>
             <a:endParaRPr lang="en-US" sz="3000" dirty="0"/>
           </a:p>
@@ -7869,7 +7869,7 @@
                 <a:ea typeface="Calibri" pitchFamily="34" charset="-122"/>
                 <a:cs typeface="Calibri" pitchFamily="34" charset="-120"/>
               </a:rPr>
-              <a:t>Un papillon de nuit coincé dans une machine, en 1947, collé dans le cahier de bord.</a:t>
+              <a:t>C'est exactement ce que vous avez fait avec le robot humain.</a:t>
             </a:r>
             <a:endParaRPr lang="en-US" sz="2000" dirty="0"/>
           </a:p>
@@ -8008,22 +8008,22 @@
           <a:p>
             <a:pPr algn="ctr" indent="0" marL="0">
               <a:lnSpc>
-                <a:spcPts val="4800"/>
+                <a:spcPts val="4200"/>
               </a:lnSpc>
               <a:buNone/>
             </a:pPr>
             <a:r>
-              <a:rPr lang="en-US" sz="4200" b="1" dirty="0">
-                <a:solidFill>
-                  <a:srgbClr val="FFFFFF"/>
-                </a:solidFill>
-                <a:latin typeface="Calibri" pitchFamily="34" charset="0"/>
-                <a:ea typeface="Calibri" pitchFamily="34" charset="-122"/>
-                <a:cs typeface="Calibri" pitchFamily="34" charset="-120"/>
-              </a:rPr>
-              <a:t>Dans quel domaine n'y a-t-il PAS de code ?</a:t>
-            </a:r>
-            <a:endParaRPr lang="en-US" sz="4200" dirty="0"/>
+              <a:rPr lang="en-US" sz="3600" b="1" dirty="0">
+                <a:solidFill>
+                  <a:srgbClr val="FFFFFF"/>
+                </a:solidFill>
+                <a:latin typeface="Calibri" pitchFamily="34" charset="0"/>
+                <a:ea typeface="Calibri" pitchFamily="34" charset="-122"/>
+                <a:cs typeface="Calibri" pitchFamily="34" charset="-120"/>
+              </a:rPr>
+              <a:t>Le robot humain de samedi dernier comprenait combien d'ordres ?</a:t>
+            </a:r>
+            <a:endParaRPr lang="en-US" sz="3600" dirty="0"/>
           </a:p>
         </p:txBody>
       </p:sp>
@@ -8124,7 +8124,7 @@
                 <a:ea typeface="Calibri" pitchFamily="34" charset="-122"/>
                 <a:cs typeface="Calibri" pitchFamily="34" charset="-120"/>
               </a:rPr>
-              <a:t>La santé</a:t>
+              <a:t>Un seul</a:t>
             </a:r>
             <a:endParaRPr lang="en-US" sz="2300" dirty="0"/>
           </a:p>
@@ -8227,7 +8227,7 @@
                 <a:ea typeface="Calibri" pitchFamily="34" charset="-122"/>
                 <a:cs typeface="Calibri" pitchFamily="34" charset="-120"/>
               </a:rPr>
-              <a:t>L'agriculture</a:t>
+              <a:t>Trois</a:t>
             </a:r>
             <a:endParaRPr lang="en-US" sz="2300" dirty="0"/>
           </a:p>
@@ -8330,7 +8330,7 @@
                 <a:ea typeface="Calibri" pitchFamily="34" charset="-122"/>
                 <a:cs typeface="Calibri" pitchFamily="34" charset="-120"/>
               </a:rPr>
-              <a:t>La musique</a:t>
+              <a:t>Dix</a:t>
             </a:r>
             <a:endParaRPr lang="en-US" sz="2300" dirty="0"/>
           </a:p>
@@ -8425,17 +8425,17 @@
               <a:buNone/>
             </a:pPr>
             <a:r>
-              <a:rPr lang="en-US" sz="1900" b="1" dirty="0">
-                <a:solidFill>
-                  <a:srgbClr val="FFFFFF"/>
-                </a:solidFill>
-                <a:latin typeface="Calibri" pitchFamily="34" charset="0"/>
-                <a:ea typeface="Calibri" pitchFamily="34" charset="-122"/>
-                <a:cs typeface="Calibri" pitchFamily="34" charset="-120"/>
-              </a:rPr>
-              <a:t>Aucun : il y a du code partout</a:t>
-            </a:r>
-            <a:endParaRPr lang="en-US" sz="1900" dirty="0"/>
+              <a:rPr lang="en-US" sz="2300" b="1" dirty="0">
+                <a:solidFill>
+                  <a:srgbClr val="FFFFFF"/>
+                </a:solidFill>
+                <a:latin typeface="Calibri" pitchFamily="34" charset="0"/>
+                <a:ea typeface="Calibri" pitchFamily="34" charset="-122"/>
+                <a:cs typeface="Calibri" pitchFamily="34" charset="-120"/>
+              </a:rPr>
+              <a:t>Tous les ordres</a:t>
+            </a:r>
+            <a:endParaRPr lang="en-US" sz="2300" dirty="0"/>
           </a:p>
         </p:txBody>
       </p:sp>
@@ -8543,7 +8543,7 @@
                 <a:ea typeface="Calibri" pitchFamily="34" charset="-122"/>
                 <a:cs typeface="Calibri" pitchFamily="34" charset="-120"/>
               </a:rPr>
-              <a:t>Dans quel domaine n'y a-t-il PAS de code ?</a:t>
+              <a:t>Le robot humain de samedi dernier comprenait combien d'ordres ?</a:t>
             </a:r>
             <a:endParaRPr lang="en-US" sz="2200" dirty="0"/>
           </a:p>
@@ -8566,7 +8566,7 @@
             </a:avLst>
           </a:prstGeom>
           <a:solidFill>
-            <a:srgbClr val="1E9E4A"/>
+            <a:srgbClr val="1F6FD0"/>
           </a:solidFill>
           <a:ln/>
         </p:spPr>
@@ -8604,7 +8604,7 @@
                 <a:ea typeface="Calibri" pitchFamily="34" charset="-122"/>
                 <a:cs typeface="Calibri" pitchFamily="34" charset="-120"/>
               </a:rPr>
-              <a:t>■   VERT</a:t>
+              <a:t>◆   BLEU</a:t>
             </a:r>
             <a:endParaRPr lang="en-US" sz="1500" dirty="0"/>
           </a:p>
@@ -8635,17 +8635,17 @@
               <a:buNone/>
             </a:pPr>
             <a:r>
-              <a:rPr lang="en-US" sz="3000" b="1" dirty="0">
-                <a:solidFill>
-                  <a:srgbClr val="FFFFFF"/>
-                </a:solidFill>
-                <a:latin typeface="Calibri" pitchFamily="34" charset="0"/>
-                <a:ea typeface="Calibri" pitchFamily="34" charset="-122"/>
-                <a:cs typeface="Calibri" pitchFamily="34" charset="-120"/>
-              </a:rPr>
-              <a:t>Aucun : il y a du code partout</a:t>
-            </a:r>
-            <a:endParaRPr lang="en-US" sz="3000" dirty="0"/>
+              <a:rPr lang="en-US" sz="3600" b="1" dirty="0">
+                <a:solidFill>
+                  <a:srgbClr val="FFFFFF"/>
+                </a:solidFill>
+                <a:latin typeface="Calibri" pitchFamily="34" charset="0"/>
+                <a:ea typeface="Calibri" pitchFamily="34" charset="-122"/>
+                <a:cs typeface="Calibri" pitchFamily="34" charset="-120"/>
+              </a:rPr>
+              <a:t>Trois</a:t>
+            </a:r>
+            <a:endParaRPr lang="en-US" sz="3600" dirty="0"/>
           </a:p>
         </p:txBody>
       </p:sp>
@@ -8785,7 +8785,7 @@
                 <a:ea typeface="Calibri" pitchFamily="34" charset="-122"/>
                 <a:cs typeface="Calibri" pitchFamily="34" charset="-120"/>
               </a:rPr>
-              <a:t>C'est pour ça que ça vous servira dans le métier que vous choisirez, quel qu'il soit.</a:t>
+              <a:t>Trois : avance, tourne à gauche, tourne à droite. Et il s'est cogné — parce qu'il obéit à la lettre.</a:t>
             </a:r>
             <a:endParaRPr lang="en-US" sz="2000" dirty="0"/>
           </a:p>
@@ -8937,7 +8937,7 @@
                 <a:ea typeface="Calibri" pitchFamily="34" charset="-122"/>
                 <a:cs typeface="Calibri" pitchFamily="34" charset="-120"/>
               </a:rPr>
-              <a:t>Que fait la commande print en Python ?</a:t>
+              <a:t>Dans quel domaine n'y a-t-il PAS de code ?</a:t>
             </a:r>
             <a:endParaRPr lang="en-US" sz="4200" dirty="0"/>
           </a:p>
@@ -9032,17 +9032,17 @@
               <a:buNone/>
             </a:pPr>
             <a:r>
-              <a:rPr lang="en-US" sz="1900" b="1" dirty="0">
-                <a:solidFill>
-                  <a:srgbClr val="FFFFFF"/>
-                </a:solidFill>
-                <a:latin typeface="Calibri" pitchFamily="34" charset="0"/>
-                <a:ea typeface="Calibri" pitchFamily="34" charset="-122"/>
-                <a:cs typeface="Calibri" pitchFamily="34" charset="-120"/>
-              </a:rPr>
-              <a:t>Elle affiche du texte à l'écran</a:t>
-            </a:r>
-            <a:endParaRPr lang="en-US" sz="1900" dirty="0"/>
+              <a:rPr lang="en-US" sz="2300" b="1" dirty="0">
+                <a:solidFill>
+                  <a:srgbClr val="FFFFFF"/>
+                </a:solidFill>
+                <a:latin typeface="Calibri" pitchFamily="34" charset="0"/>
+                <a:ea typeface="Calibri" pitchFamily="34" charset="-122"/>
+                <a:cs typeface="Calibri" pitchFamily="34" charset="-120"/>
+              </a:rPr>
+              <a:t>La santé</a:t>
+            </a:r>
+            <a:endParaRPr lang="en-US" sz="2300" dirty="0"/>
           </a:p>
         </p:txBody>
       </p:sp>
@@ -9143,7 +9143,7 @@
                 <a:ea typeface="Calibri" pitchFamily="34" charset="-122"/>
                 <a:cs typeface="Calibri" pitchFamily="34" charset="-120"/>
               </a:rPr>
-              <a:t>Elle imprime sur du papier</a:t>
+              <a:t>L'agriculture</a:t>
             </a:r>
             <a:endParaRPr lang="en-US" sz="2300" dirty="0"/>
           </a:p>
@@ -9246,7 +9246,7 @@
                 <a:ea typeface="Calibri" pitchFamily="34" charset="-122"/>
                 <a:cs typeface="Calibri" pitchFamily="34" charset="-120"/>
               </a:rPr>
-              <a:t>Elle efface le programme</a:t>
+              <a:t>La musique</a:t>
             </a:r>
             <a:endParaRPr lang="en-US" sz="2300" dirty="0"/>
           </a:p>
@@ -9341,17 +9341,17 @@
               <a:buNone/>
             </a:pPr>
             <a:r>
-              <a:rPr lang="en-US" sz="2300" b="1" dirty="0">
-                <a:solidFill>
-                  <a:srgbClr val="FFFFFF"/>
-                </a:solidFill>
-                <a:latin typeface="Calibri" pitchFamily="34" charset="0"/>
-                <a:ea typeface="Calibri" pitchFamily="34" charset="-122"/>
-                <a:cs typeface="Calibri" pitchFamily="34" charset="-120"/>
-              </a:rPr>
-              <a:t>Elle calcule</a:t>
-            </a:r>
-            <a:endParaRPr lang="en-US" sz="2300" dirty="0"/>
+              <a:rPr lang="en-US" sz="1900" b="1" dirty="0">
+                <a:solidFill>
+                  <a:srgbClr val="FFFFFF"/>
+                </a:solidFill>
+                <a:latin typeface="Calibri" pitchFamily="34" charset="0"/>
+                <a:ea typeface="Calibri" pitchFamily="34" charset="-122"/>
+                <a:cs typeface="Calibri" pitchFamily="34" charset="-120"/>
+              </a:rPr>
+              <a:t>Aucun : il y a du code partout</a:t>
+            </a:r>
+            <a:endParaRPr lang="en-US" sz="1900" dirty="0"/>
           </a:p>
         </p:txBody>
       </p:sp>
@@ -9501,7 +9501,7 @@
                 <a:ea typeface="Calibri" pitchFamily="34" charset="-122"/>
                 <a:cs typeface="Calibri" pitchFamily="34" charset="-120"/>
               </a:rPr>
-              <a:t>L'ordinateur lit ton programme…</a:t>
+              <a:t>Une recette de cuisine, c'est…</a:t>
             </a:r>
             <a:endParaRPr lang="en-US" sz="4200" dirty="0"/>
           </a:p>
@@ -9596,17 +9596,17 @@
               <a:buNone/>
             </a:pPr>
             <a:r>
-              <a:rPr lang="en-US" sz="1900" b="1" dirty="0">
-                <a:solidFill>
-                  <a:srgbClr val="FFFFFF"/>
-                </a:solidFill>
-                <a:latin typeface="Calibri" pitchFamily="34" charset="0"/>
-                <a:ea typeface="Calibri" pitchFamily="34" charset="-122"/>
-                <a:cs typeface="Calibri" pitchFamily="34" charset="-120"/>
-              </a:rPr>
-              <a:t>De haut en bas, ligne par ligne</a:t>
-            </a:r>
-            <a:endParaRPr lang="en-US" sz="1900" dirty="0"/>
+              <a:rPr lang="en-US" sz="2300" b="1" dirty="0">
+                <a:solidFill>
+                  <a:srgbClr val="FFFFFF"/>
+                </a:solidFill>
+                <a:latin typeface="Calibri" pitchFamily="34" charset="0"/>
+                <a:ea typeface="Calibri" pitchFamily="34" charset="-122"/>
+                <a:cs typeface="Calibri" pitchFamily="34" charset="-120"/>
+              </a:rPr>
+              <a:t>Un algorithme</a:t>
+            </a:r>
+            <a:endParaRPr lang="en-US" sz="2300" dirty="0"/>
           </a:p>
         </p:txBody>
       </p:sp>
@@ -9707,7 +9707,7 @@
                 <a:ea typeface="Calibri" pitchFamily="34" charset="-122"/>
                 <a:cs typeface="Calibri" pitchFamily="34" charset="-120"/>
               </a:rPr>
-              <a:t>De bas en haut</a:t>
+              <a:t>Un langage</a:t>
             </a:r>
             <a:endParaRPr lang="en-US" sz="2300" dirty="0"/>
           </a:p>
@@ -9810,7 +9810,7 @@
                 <a:ea typeface="Calibri" pitchFamily="34" charset="-122"/>
                 <a:cs typeface="Calibri" pitchFamily="34" charset="-120"/>
               </a:rPr>
-              <a:t>Dans le désordre</a:t>
+              <a:t>Un programme Python</a:t>
             </a:r>
             <a:endParaRPr lang="en-US" sz="2300" dirty="0"/>
           </a:p>
@@ -9905,17 +9905,17 @@
               <a:buNone/>
             </a:pPr>
             <a:r>
-              <a:rPr lang="en-US" sz="1900" b="1" dirty="0">
-                <a:solidFill>
-                  <a:srgbClr val="FFFFFF"/>
-                </a:solidFill>
-                <a:latin typeface="Calibri" pitchFamily="34" charset="0"/>
-                <a:ea typeface="Calibri" pitchFamily="34" charset="-122"/>
-                <a:cs typeface="Calibri" pitchFamily="34" charset="-120"/>
-              </a:rPr>
-              <a:t>En commençant par le milieu</a:t>
-            </a:r>
-            <a:endParaRPr lang="en-US" sz="1900" dirty="0"/>
+              <a:rPr lang="en-US" sz="2300" b="1" dirty="0">
+                <a:solidFill>
+                  <a:srgbClr val="FFFFFF"/>
+                </a:solidFill>
+                <a:latin typeface="Calibri" pitchFamily="34" charset="0"/>
+                <a:ea typeface="Calibri" pitchFamily="34" charset="-122"/>
+                <a:cs typeface="Calibri" pitchFamily="34" charset="-120"/>
+              </a:rPr>
+              <a:t>Rien à voir avec le code</a:t>
+            </a:r>
+            <a:endParaRPr lang="en-US" sz="2300" dirty="0"/>
           </a:p>
         </p:txBody>
       </p:sp>
@@ -10023,7 +10023,7 @@
                 <a:ea typeface="Calibri" pitchFamily="34" charset="-122"/>
                 <a:cs typeface="Calibri" pitchFamily="34" charset="-120"/>
               </a:rPr>
-              <a:t>L'ordinateur lit ton programme…</a:t>
+              <a:t>Une recette de cuisine, c'est…</a:t>
             </a:r>
             <a:endParaRPr lang="en-US" sz="2200" dirty="0"/>
           </a:p>
@@ -10115,17 +10115,17 @@
               <a:buNone/>
             </a:pPr>
             <a:r>
-              <a:rPr lang="en-US" sz="3000" b="1" dirty="0">
-                <a:solidFill>
-                  <a:srgbClr val="FFFFFF"/>
-                </a:solidFill>
-                <a:latin typeface="Calibri" pitchFamily="34" charset="0"/>
-                <a:ea typeface="Calibri" pitchFamily="34" charset="-122"/>
-                <a:cs typeface="Calibri" pitchFamily="34" charset="-120"/>
-              </a:rPr>
-              <a:t>De haut en bas, ligne par ligne</a:t>
-            </a:r>
-            <a:endParaRPr lang="en-US" sz="3000" dirty="0"/>
+              <a:rPr lang="en-US" sz="3600" b="1" dirty="0">
+                <a:solidFill>
+                  <a:srgbClr val="FFFFFF"/>
+                </a:solidFill>
+                <a:latin typeface="Calibri" pitchFamily="34" charset="0"/>
+                <a:ea typeface="Calibri" pitchFamily="34" charset="-122"/>
+                <a:cs typeface="Calibri" pitchFamily="34" charset="-120"/>
+              </a:rPr>
+              <a:t>Un algorithme</a:t>
+            </a:r>
+            <a:endParaRPr lang="en-US" sz="3600" dirty="0"/>
           </a:p>
         </p:txBody>
       </p:sp>
@@ -10265,7 +10265,7 @@
                 <a:ea typeface="Calibri" pitchFamily="34" charset="-122"/>
                 <a:cs typeface="Calibri" pitchFamily="34" charset="-120"/>
               </a:rPr>
-              <a:t>Toujours. C'est la règle numéro un.</a:t>
+              <a:t>Des étapes précises, dans le bon ordre. Un itinéraire aussi. Et les règles du morpion, qu'on va écrire.</a:t>
             </a:r>
             <a:endParaRPr lang="en-US" sz="2000" dirty="0"/>
           </a:p>
@@ -10417,7 +10417,7 @@
                 <a:ea typeface="Calibri" pitchFamily="34" charset="-122"/>
                 <a:cs typeface="Calibri" pitchFamily="34" charset="-120"/>
               </a:rPr>
-              <a:t>Comment s'appelle le logiciel dans lequel on écrit notre code ?</a:t>
+              <a:t>Qui a écrit la première version de Facebook dans sa chambre d'étudiant ?</a:t>
             </a:r>
             <a:endParaRPr lang="en-US" sz="3600" dirty="0"/>
           </a:p>
@@ -10520,7 +10520,7 @@
                 <a:ea typeface="Calibri" pitchFamily="34" charset="-122"/>
                 <a:cs typeface="Calibri" pitchFamily="34" charset="-120"/>
               </a:rPr>
-              <a:t>Python</a:t>
+              <a:t>Mark Zuckerberg</a:t>
             </a:r>
             <a:endParaRPr lang="en-US" sz="2300" dirty="0"/>
           </a:p>
@@ -10623,7 +10623,7 @@
                 <a:ea typeface="Calibri" pitchFamily="34" charset="-122"/>
                 <a:cs typeface="Calibri" pitchFamily="34" charset="-120"/>
               </a:rPr>
-              <a:t>Thonny</a:t>
+              <a:t>Elon Musk</a:t>
             </a:r>
             <a:endParaRPr lang="en-US" sz="2300" dirty="0"/>
           </a:p>
@@ -10726,7 +10726,7 @@
                 <a:ea typeface="Calibri" pitchFamily="34" charset="-122"/>
                 <a:cs typeface="Calibri" pitchFamily="34" charset="-120"/>
               </a:rPr>
-              <a:t>Kahoot</a:t>
+              <a:t>Guido van Rossum</a:t>
             </a:r>
             <a:endParaRPr lang="en-US" sz="2300" dirty="0"/>
           </a:p>
@@ -10829,7 +10829,7 @@
                 <a:ea typeface="Calibri" pitchFamily="34" charset="-122"/>
                 <a:cs typeface="Calibri" pitchFamily="34" charset="-120"/>
               </a:rPr>
-              <a:t>Windows</a:t>
+              <a:t>Nick D'Aloisio</a:t>
             </a:r>
             <a:endParaRPr lang="en-US" sz="2300" dirty="0"/>
           </a:p>
@@ -10939,7 +10939,7 @@
                 <a:ea typeface="Calibri" pitchFamily="34" charset="-122"/>
                 <a:cs typeface="Calibri" pitchFamily="34" charset="-120"/>
               </a:rPr>
-              <a:t>Comment s'appelle le logiciel dans lequel on écrit notre code ?</a:t>
+              <a:t>Qui a écrit la première version de Facebook dans sa chambre d'étudiant ?</a:t>
             </a:r>
             <a:endParaRPr lang="en-US" sz="2200" dirty="0"/>
           </a:p>
@@ -10962,7 +10962,7 @@
             </a:avLst>
           </a:prstGeom>
           <a:solidFill>
-            <a:srgbClr val="1F6FD0"/>
+            <a:srgbClr val="D7262B"/>
           </a:solidFill>
           <a:ln/>
         </p:spPr>
@@ -11000,7 +11000,7 @@
                 <a:ea typeface="Calibri" pitchFamily="34" charset="-122"/>
                 <a:cs typeface="Calibri" pitchFamily="34" charset="-120"/>
               </a:rPr>
-              <a:t>◆   BLEU</a:t>
+              <a:t>▲   ROUGE</a:t>
             </a:r>
             <a:endParaRPr lang="en-US" sz="1500" dirty="0"/>
           </a:p>
@@ -11039,7 +11039,7 @@
                 <a:ea typeface="Calibri" pitchFamily="34" charset="-122"/>
                 <a:cs typeface="Calibri" pitchFamily="34" charset="-120"/>
               </a:rPr>
-              <a:t>Thonny</a:t>
+              <a:t>Mark Zuckerberg</a:t>
             </a:r>
             <a:endParaRPr lang="en-US" sz="3600" dirty="0"/>
           </a:p>
@@ -11181,7 +11181,7 @@
                 <a:ea typeface="Calibri" pitchFamily="34" charset="-122"/>
                 <a:cs typeface="Calibri" pitchFamily="34" charset="-120"/>
               </a:rPr>
-              <a:t>Python est la LANGUE. Thonny est la FEUILLE, avec le bouton vas-y.</a:t>
+              <a:t>À 19 ans. Mais il avait commencé bien plus tôt, avec des programmes minuscules.</a:t>
             </a:r>
             <a:endParaRPr lang="en-US" sz="2000" dirty="0"/>
           </a:p>
@@ -11320,22 +11320,22 @@
           <a:p>
             <a:pPr algn="ctr" indent="0" marL="0">
               <a:lnSpc>
-                <a:spcPts val="4800"/>
+                <a:spcPts val="4200"/>
               </a:lnSpc>
               <a:buNone/>
             </a:pPr>
             <a:r>
-              <a:rPr lang="en-US" sz="4200" b="1" dirty="0">
-                <a:solidFill>
-                  <a:srgbClr val="FFFFFF"/>
-                </a:solidFill>
-                <a:latin typeface="Courier New" pitchFamily="34" charset="0"/>
-                <a:ea typeface="Courier New" pitchFamily="34" charset="-122"/>
-                <a:cs typeface="Courier New" pitchFamily="34" charset="-120"/>
-              </a:rPr>
-              <a:t>Que va afficher   print("Bonjour")   ?</a:t>
-            </a:r>
-            <a:endParaRPr lang="en-US" sz="4200" dirty="0"/>
+              <a:rPr lang="en-US" sz="3600" b="1" dirty="0">
+                <a:solidFill>
+                  <a:srgbClr val="FFFFFF"/>
+                </a:solidFill>
+                <a:latin typeface="Calibri" pitchFamily="34" charset="0"/>
+                <a:ea typeface="Calibri" pitchFamily="34" charset="-122"/>
+                <a:cs typeface="Calibri" pitchFamily="34" charset="-120"/>
+              </a:rPr>
+              <a:t>À quel âge Elon Musk a-t-il vendu son premier jeu vidéo ?</a:t>
+            </a:r>
+            <a:endParaRPr lang="en-US" sz="3600" dirty="0"/>
           </a:p>
         </p:txBody>
       </p:sp>
@@ -11436,7 +11436,7 @@
                 <a:ea typeface="Calibri" pitchFamily="34" charset="-122"/>
                 <a:cs typeface="Calibri" pitchFamily="34" charset="-120"/>
               </a:rPr>
-              <a:t>Bonjour</a:t>
+              <a:t>8 ans</a:t>
             </a:r>
             <a:endParaRPr lang="en-US" sz="2300" dirty="0"/>
           </a:p>
@@ -11539,7 +11539,7 @@
                 <a:ea typeface="Calibri" pitchFamily="34" charset="-122"/>
                 <a:cs typeface="Calibri" pitchFamily="34" charset="-120"/>
               </a:rPr>
-              <a:t>print Bonjour</a:t>
+              <a:t>12 ans</a:t>
             </a:r>
             <a:endParaRPr lang="en-US" sz="2300" dirty="0"/>
           </a:p>
@@ -11634,17 +11634,17 @@
               <a:buNone/>
             </a:pPr>
             <a:r>
-              <a:rPr lang="en-US" sz="1900" b="1" dirty="0">
-                <a:solidFill>
-                  <a:srgbClr val="FFFFFF"/>
-                </a:solidFill>
-                <a:latin typeface="Calibri" pitchFamily="34" charset="0"/>
-                <a:ea typeface="Calibri" pitchFamily="34" charset="-122"/>
-                <a:cs typeface="Calibri" pitchFamily="34" charset="-120"/>
-              </a:rPr>
-              <a:t>"Bonjour" avec les guillemets</a:t>
-            </a:r>
-            <a:endParaRPr lang="en-US" sz="1900" dirty="0"/>
+              <a:rPr lang="en-US" sz="2300" b="1" dirty="0">
+                <a:solidFill>
+                  <a:srgbClr val="FFFFFF"/>
+                </a:solidFill>
+                <a:latin typeface="Calibri" pitchFamily="34" charset="0"/>
+                <a:ea typeface="Calibri" pitchFamily="34" charset="-122"/>
+                <a:cs typeface="Calibri" pitchFamily="34" charset="-120"/>
+              </a:rPr>
+              <a:t>20 ans</a:t>
+            </a:r>
+            <a:endParaRPr lang="en-US" sz="2300" dirty="0"/>
           </a:p>
         </p:txBody>
       </p:sp>
@@ -11745,7 +11745,7 @@
                 <a:ea typeface="Calibri" pitchFamily="34" charset="-122"/>
                 <a:cs typeface="Calibri" pitchFamily="34" charset="-120"/>
               </a:rPr>
-              <a:t>Rien</a:t>
+              <a:t>30 ans</a:t>
             </a:r>
             <a:endParaRPr lang="en-US" sz="2300" dirty="0"/>
           </a:p>
@@ -11851,11 +11851,11 @@
                 <a:solidFill>
                   <a:srgbClr val="A8A8C0"/>
                 </a:solidFill>
-                <a:latin typeface="Courier New" pitchFamily="34" charset="0"/>
-                <a:ea typeface="Courier New" pitchFamily="34" charset="-122"/>
-                <a:cs typeface="Courier New" pitchFamily="34" charset="-120"/>
-              </a:rPr>
-              <a:t>Que va afficher   print("Bonjour")   ?</a:t>
+                <a:latin typeface="Calibri" pitchFamily="34" charset="0"/>
+                <a:ea typeface="Calibri" pitchFamily="34" charset="-122"/>
+                <a:cs typeface="Calibri" pitchFamily="34" charset="-120"/>
+              </a:rPr>
+              <a:t>À quel âge Elon Musk a-t-il vendu son premier jeu vidéo ?</a:t>
             </a:r>
             <a:endParaRPr lang="en-US" sz="2200" dirty="0"/>
           </a:p>
@@ -11878,7 +11878,7 @@
             </a:avLst>
           </a:prstGeom>
           <a:solidFill>
-            <a:srgbClr val="D7262B"/>
+            <a:srgbClr val="1F6FD0"/>
           </a:solidFill>
           <a:ln/>
         </p:spPr>
@@ -11916,7 +11916,7 @@
                 <a:ea typeface="Calibri" pitchFamily="34" charset="-122"/>
                 <a:cs typeface="Calibri" pitchFamily="34" charset="-120"/>
               </a:rPr>
-              <a:t>▲   ROUGE</a:t>
+              <a:t>◆   BLEU</a:t>
             </a:r>
             <a:endParaRPr lang="en-US" sz="1500" dirty="0"/>
           </a:p>
@@ -11955,7 +11955,7 @@
                 <a:ea typeface="Calibri" pitchFamily="34" charset="-122"/>
                 <a:cs typeface="Calibri" pitchFamily="34" charset="-120"/>
               </a:rPr>
-              <a:t>Bonjour</a:t>
+              <a:t>12 ans</a:t>
             </a:r>
             <a:endParaRPr lang="en-US" sz="3600" dirty="0"/>
           </a:p>
@@ -12097,7 +12097,7 @@
                 <a:ea typeface="Calibri" pitchFamily="34" charset="-122"/>
                 <a:cs typeface="Calibri" pitchFamily="34" charset="-120"/>
               </a:rPr>
-              <a:t>Les guillemets servent à dire « ceci est du texte ». Ils ne s'affichent pas.</a:t>
+              <a:t>Douze ans. Presque votre âge. Le jeu s'appelait Blastar, et un magazine l'a acheté.</a:t>
             </a:r>
             <a:endParaRPr lang="en-US" sz="2000" dirty="0"/>
           </a:p>
@@ -12249,7 +12249,7 @@
                 <a:ea typeface="Calibri" pitchFamily="34" charset="-122"/>
                 <a:cs typeface="Calibri" pitchFamily="34" charset="-120"/>
               </a:rPr>
-              <a:t>L'ordinateur est surtout…</a:t>
+              <a:t>À 11 ans, Gitanjali Rao a inventé un appareil qui…</a:t>
             </a:r>
             <a:endParaRPr lang="en-US" sz="4200" dirty="0"/>
           </a:p>
@@ -12344,17 +12344,17 @@
               <a:buNone/>
             </a:pPr>
             <a:r>
-              <a:rPr lang="en-US" sz="2300" b="1" dirty="0">
-                <a:solidFill>
-                  <a:srgbClr val="FFFFFF"/>
-                </a:solidFill>
-                <a:latin typeface="Calibri" pitchFamily="34" charset="0"/>
-                <a:ea typeface="Calibri" pitchFamily="34" charset="-122"/>
-                <a:cs typeface="Calibri" pitchFamily="34" charset="-120"/>
-              </a:rPr>
-              <a:t>Intelligent</a:t>
-            </a:r>
-            <a:endParaRPr lang="en-US" sz="2300" dirty="0"/>
+              <a:rPr lang="en-US" sz="1900" b="1" dirty="0">
+                <a:solidFill>
+                  <a:srgbClr val="FFFFFF"/>
+                </a:solidFill>
+                <a:latin typeface="Calibri" pitchFamily="34" charset="0"/>
+                <a:ea typeface="Calibri" pitchFamily="34" charset="-122"/>
+                <a:cs typeface="Calibri" pitchFamily="34" charset="-120"/>
+              </a:rPr>
+              <a:t>détecte le poison dans l'eau</a:t>
+            </a:r>
+            <a:endParaRPr lang="en-US" sz="1900" dirty="0"/>
           </a:p>
         </p:txBody>
       </p:sp>
@@ -12455,7 +12455,7 @@
                 <a:ea typeface="Calibri" pitchFamily="34" charset="-122"/>
                 <a:cs typeface="Calibri" pitchFamily="34" charset="-120"/>
               </a:rPr>
-              <a:t>Obéissant</a:t>
+              <a:t>répare les téléphones</a:t>
             </a:r>
             <a:endParaRPr lang="en-US" sz="2300" dirty="0"/>
           </a:p>
@@ -12558,7 +12558,7 @@
                 <a:ea typeface="Calibri" pitchFamily="34" charset="-122"/>
                 <a:cs typeface="Calibri" pitchFamily="34" charset="-120"/>
               </a:rPr>
-              <a:t>Paresseux</a:t>
+              <a:t>traduit les langues</a:t>
             </a:r>
             <a:endParaRPr lang="en-US" sz="2300" dirty="0"/>
           </a:p>
@@ -12661,7 +12661,7 @@
                 <a:ea typeface="Calibri" pitchFamily="34" charset="-122"/>
                 <a:cs typeface="Calibri" pitchFamily="34" charset="-120"/>
               </a:rPr>
-              <a:t>Magique</a:t>
+              <a:t>dessine des cartes</a:t>
             </a:r>
             <a:endParaRPr lang="en-US" sz="2300" dirty="0"/>
           </a:p>
@@ -12771,7 +12771,7 @@
                 <a:ea typeface="Calibri" pitchFamily="34" charset="-122"/>
                 <a:cs typeface="Calibri" pitchFamily="34" charset="-120"/>
               </a:rPr>
-              <a:t>L'ordinateur est surtout…</a:t>
+              <a:t>À 11 ans, Gitanjali Rao a inventé un appareil qui…</a:t>
             </a:r>
             <a:endParaRPr lang="en-US" sz="2200" dirty="0"/>
           </a:p>
@@ -12794,7 +12794,7 @@
             </a:avLst>
           </a:prstGeom>
           <a:solidFill>
-            <a:srgbClr val="1F6FD0"/>
+            <a:srgbClr val="D7262B"/>
           </a:solidFill>
           <a:ln/>
         </p:spPr>
@@ -12832,7 +12832,7 @@
                 <a:ea typeface="Calibri" pitchFamily="34" charset="-122"/>
                 <a:cs typeface="Calibri" pitchFamily="34" charset="-120"/>
               </a:rPr>
-              <a:t>◆   BLEU</a:t>
+              <a:t>▲   ROUGE</a:t>
             </a:r>
             <a:endParaRPr lang="en-US" sz="1500" dirty="0"/>
           </a:p>
@@ -12871,7 +12871,7 @@
                 <a:ea typeface="Calibri" pitchFamily="34" charset="-122"/>
                 <a:cs typeface="Calibri" pitchFamily="34" charset="-120"/>
               </a:rPr>
-              <a:t>Obéissant</a:t>
+              <a:t>détecte le poison dans l'eau</a:t>
             </a:r>
             <a:endParaRPr lang="en-US" sz="3600" dirty="0"/>
           </a:p>
@@ -13013,7 +13013,7 @@
                 <a:ea typeface="Calibri" pitchFamily="34" charset="-122"/>
                 <a:cs typeface="Calibri" pitchFamily="34" charset="-120"/>
               </a:rPr>
-              <a:t>Il fait exactement ce qui est écrit. S'il fait une bêtise, ce n'est pas lui qui s'est trompé.</a:t>
+              <a:t>Elle avait entendu parler d'une ville où l'eau du robinet était empoisonnée. Coder, ce n'est pas faire des jeux : c'est résoudre.</a:t>
             </a:r>
             <a:endParaRPr lang="en-US" sz="2000" dirty="0"/>
           </a:p>
@@ -13152,22 +13152,22 @@
           <a:p>
             <a:pPr algn="ctr" indent="0" marL="0">
               <a:lnSpc>
-                <a:spcPts val="4200"/>
+                <a:spcPts val="4800"/>
               </a:lnSpc>
               <a:buNone/>
             </a:pPr>
             <a:r>
-              <a:rPr lang="en-US" sz="3600" b="1" dirty="0">
-                <a:solidFill>
-                  <a:srgbClr val="FFFFFF"/>
-                </a:solidFill>
-                <a:latin typeface="Calibri" pitchFamily="34" charset="0"/>
-                <a:ea typeface="Calibri" pitchFamily="34" charset="-122"/>
-                <a:cs typeface="Calibri" pitchFamily="34" charset="-120"/>
-              </a:rPr>
-              <a:t>À quel âge Elon Musk a-t-il vendu son premier jeu vidéo ?</a:t>
-            </a:r>
-            <a:endParaRPr lang="en-US" sz="3600" dirty="0"/>
+              <a:rPr lang="en-US" sz="4200" b="1" dirty="0">
+                <a:solidFill>
+                  <a:srgbClr val="FFFFFF"/>
+                </a:solidFill>
+                <a:latin typeface="Calibri" pitchFamily="34" charset="0"/>
+                <a:ea typeface="Calibri" pitchFamily="34" charset="-122"/>
+                <a:cs typeface="Calibri" pitchFamily="34" charset="-120"/>
+              </a:rPr>
+              <a:t>Kelvin Doe, en Sierra Leone, a construit sa radio avec…</a:t>
+            </a:r>
+            <a:endParaRPr lang="en-US" sz="4200" dirty="0"/>
           </a:p>
         </p:txBody>
       </p:sp>
@@ -13268,7 +13268,7 @@
                 <a:ea typeface="Calibri" pitchFamily="34" charset="-122"/>
                 <a:cs typeface="Calibri" pitchFamily="34" charset="-120"/>
               </a:rPr>
-              <a:t>8 ans</a:t>
+              <a:t>des pièces neuves</a:t>
             </a:r>
             <a:endParaRPr lang="en-US" sz="2300" dirty="0"/>
           </a:p>
@@ -13371,7 +13371,7 @@
                 <a:ea typeface="Calibri" pitchFamily="34" charset="-122"/>
                 <a:cs typeface="Calibri" pitchFamily="34" charset="-120"/>
               </a:rPr>
-              <a:t>12 ans</a:t>
+              <a:t>des déchets ramassés</a:t>
             </a:r>
             <a:endParaRPr lang="en-US" sz="2300" dirty="0"/>
           </a:p>
@@ -13474,7 +13474,7 @@
                 <a:ea typeface="Calibri" pitchFamily="34" charset="-122"/>
                 <a:cs typeface="Calibri" pitchFamily="34" charset="-120"/>
               </a:rPr>
-              <a:t>20 ans</a:t>
+              <a:t>un kit acheté en magasin</a:t>
             </a:r>
             <a:endParaRPr lang="en-US" sz="2300" dirty="0"/>
           </a:p>
@@ -13569,17 +13569,17 @@
               <a:buNone/>
             </a:pPr>
             <a:r>
-              <a:rPr lang="en-US" sz="2300" b="1" dirty="0">
-                <a:solidFill>
-                  <a:srgbClr val="FFFFFF"/>
-                </a:solidFill>
-                <a:latin typeface="Calibri" pitchFamily="34" charset="0"/>
-                <a:ea typeface="Calibri" pitchFamily="34" charset="-122"/>
-                <a:cs typeface="Calibri" pitchFamily="34" charset="-120"/>
-              </a:rPr>
-              <a:t>30 ans</a:t>
-            </a:r>
-            <a:endParaRPr lang="en-US" sz="2300" dirty="0"/>
+              <a:rPr lang="en-US" sz="1900" b="1" dirty="0">
+                <a:solidFill>
+                  <a:srgbClr val="FFFFFF"/>
+                </a:solidFill>
+                <a:latin typeface="Calibri" pitchFamily="34" charset="0"/>
+                <a:ea typeface="Calibri" pitchFamily="34" charset="-122"/>
+                <a:cs typeface="Calibri" pitchFamily="34" charset="-120"/>
+              </a:rPr>
+              <a:t>l'aide d'une grande entreprise</a:t>
+            </a:r>
+            <a:endParaRPr lang="en-US" sz="1900" dirty="0"/>
           </a:p>
         </p:txBody>
       </p:sp>
@@ -13687,7 +13687,7 @@
                 <a:ea typeface="Calibri" pitchFamily="34" charset="-122"/>
                 <a:cs typeface="Calibri" pitchFamily="34" charset="-120"/>
               </a:rPr>
-              <a:t>À quel âge Elon Musk a-t-il vendu son premier jeu vidéo ?</a:t>
+              <a:t>Kelvin Doe, en Sierra Leone, a construit sa radio avec…</a:t>
             </a:r>
             <a:endParaRPr lang="en-US" sz="2200" dirty="0"/>
           </a:p>
@@ -13787,7 +13787,7 @@
                 <a:ea typeface="Calibri" pitchFamily="34" charset="-122"/>
                 <a:cs typeface="Calibri" pitchFamily="34" charset="-120"/>
               </a:rPr>
-              <a:t>12 ans</a:t>
+              <a:t>des déchets ramassés</a:t>
             </a:r>
             <a:endParaRPr lang="en-US" sz="3600" dirty="0"/>
           </a:p>
@@ -13929,7 +13929,7 @@
                 <a:ea typeface="Calibri" pitchFamily="34" charset="-122"/>
                 <a:cs typeface="Calibri" pitchFamily="34" charset="-120"/>
               </a:rPr>
-              <a:t>Douze ans. Presque votre âge. Le jeu s'appelait Blastar, et un magazine l'a acheté.</a:t>
+              <a:t>Chez lui, il n'y avait pas d'électricité tous les jours. Il a fabriqué avec ce qu'il avait sous la main.</a:t>
             </a:r>
             <a:endParaRPr lang="en-US" sz="2000" dirty="0"/>
           </a:p>
@@ -14039,7 +14039,7 @@
                 <a:ea typeface="Calibri" pitchFamily="34" charset="-122"/>
                 <a:cs typeface="Calibri" pitchFamily="34" charset="-120"/>
               </a:rPr>
-              <a:t>Que fait la commande print en Python ?</a:t>
+              <a:t>Dans quel domaine n'y a-t-il PAS de code ?</a:t>
             </a:r>
             <a:endParaRPr lang="en-US" sz="2200" dirty="0"/>
           </a:p>
@@ -14062,7 +14062,7 @@
             </a:avLst>
           </a:prstGeom>
           <a:solidFill>
-            <a:srgbClr val="D7262B"/>
+            <a:srgbClr val="1E9E4A"/>
           </a:solidFill>
           <a:ln/>
         </p:spPr>
@@ -14100,7 +14100,7 @@
                 <a:ea typeface="Calibri" pitchFamily="34" charset="-122"/>
                 <a:cs typeface="Calibri" pitchFamily="34" charset="-120"/>
               </a:rPr>
-              <a:t>▲   ROUGE</a:t>
+              <a:t>■   VERT</a:t>
             </a:r>
             <a:endParaRPr lang="en-US" sz="1500" dirty="0"/>
           </a:p>
@@ -14139,7 +14139,7 @@
                 <a:ea typeface="Calibri" pitchFamily="34" charset="-122"/>
                 <a:cs typeface="Calibri" pitchFamily="34" charset="-120"/>
               </a:rPr>
-              <a:t>Elle affiche du texte à l'écran</a:t>
+              <a:t>Aucun : il y a du code partout</a:t>
             </a:r>
             <a:endParaRPr lang="en-US" sz="3000" dirty="0"/>
           </a:p>
@@ -14281,7 +14281,7 @@
                 <a:ea typeface="Calibri" pitchFamily="34" charset="-122"/>
                 <a:cs typeface="Calibri" pitchFamily="34" charset="-120"/>
               </a:rPr>
-              <a:t>print veut dire AFFICHE. Attention au piège : ça n'imprime rien sur du papier !</a:t>
+              <a:t>Aucun. C'est pour ça que ça vous servira dans le métier que vous choisirez, quel qu'il soit.</a:t>
             </a:r>
             <a:endParaRPr lang="en-US" sz="2000" dirty="0"/>
           </a:p>
@@ -15197,7 +15197,7 @@
                 <a:ea typeface="Calibri" pitchFamily="34" charset="-122"/>
                 <a:cs typeface="Calibri" pitchFamily="34" charset="-120"/>
               </a:rPr>
-              <a:t>Contre la fraude aux identités dans les banques africaines. En 2020, première femme à gagner un grand prix africain d'ingénierie.</a:t>
+              <a:t>Contre la fraude aux identités dans les banques africaines. Et elle l'a fait depuis l'Afrique.</a:t>
             </a:r>
             <a:endParaRPr lang="en-US" sz="2000" dirty="0"/>
           </a:p>
@@ -15737,7 +15737,7 @@
                 <a:ea typeface="Calibri" pitchFamily="34" charset="-122"/>
                 <a:cs typeface="Calibri" pitchFamily="34" charset="-120"/>
               </a:rPr>
-              <a:t>Combien de guillemets faut-il autour d'un texte ?</a:t>
+              <a:t>Au fond, l'ordinateur ne comprend que…</a:t>
             </a:r>
             <a:endParaRPr lang="en-US" sz="4200" dirty="0"/>
           </a:p>
@@ -15840,7 +15840,7 @@
                 <a:ea typeface="Calibri" pitchFamily="34" charset="-122"/>
                 <a:cs typeface="Calibri" pitchFamily="34" charset="-120"/>
               </a:rPr>
-              <a:t>Un seul</a:t>
+              <a:t>Le français</a:t>
             </a:r>
             <a:endParaRPr lang="en-US" sz="2300" dirty="0"/>
           </a:p>
@@ -15943,7 +15943,7 @@
                 <a:ea typeface="Calibri" pitchFamily="34" charset="-122"/>
                 <a:cs typeface="Calibri" pitchFamily="34" charset="-120"/>
               </a:rPr>
-              <a:t>Deux : un avant, un après</a:t>
+              <a:t>L'anglais</a:t>
             </a:r>
             <a:endParaRPr lang="en-US" sz="2300" dirty="0"/>
           </a:p>
@@ -16046,7 +16046,7 @@
                 <a:ea typeface="Calibri" pitchFamily="34" charset="-122"/>
                 <a:cs typeface="Calibri" pitchFamily="34" charset="-120"/>
               </a:rPr>
-              <a:t>Trois</a:t>
+              <a:t>Des 0 et des 1</a:t>
             </a:r>
             <a:endParaRPr lang="en-US" sz="2300" dirty="0"/>
           </a:p>
@@ -16149,7 +16149,7 @@
                 <a:ea typeface="Calibri" pitchFamily="34" charset="-122"/>
                 <a:cs typeface="Calibri" pitchFamily="34" charset="-120"/>
               </a:rPr>
-              <a:t>Aucun</a:t>
+              <a:t>Des images</a:t>
             </a:r>
             <a:endParaRPr lang="en-US" sz="2300" dirty="0"/>
           </a:p>
@@ -16259,7 +16259,7 @@
                 <a:ea typeface="Calibri" pitchFamily="34" charset="-122"/>
                 <a:cs typeface="Calibri" pitchFamily="34" charset="-120"/>
               </a:rPr>
-              <a:t>Combien de guillemets faut-il autour d'un texte ?</a:t>
+              <a:t>Au fond, l'ordinateur ne comprend que…</a:t>
             </a:r>
             <a:endParaRPr lang="en-US" sz="2200" dirty="0"/>
           </a:p>
@@ -16282,7 +16282,7 @@
             </a:avLst>
           </a:prstGeom>
           <a:solidFill>
-            <a:srgbClr val="1F6FD0"/>
+            <a:srgbClr val="E8871E"/>
           </a:solidFill>
           <a:ln/>
         </p:spPr>
@@ -16320,7 +16320,7 @@
                 <a:ea typeface="Calibri" pitchFamily="34" charset="-122"/>
                 <a:cs typeface="Calibri" pitchFamily="34" charset="-120"/>
               </a:rPr>
-              <a:t>◆   BLEU</a:t>
+              <a:t>●   ORANGE</a:t>
             </a:r>
             <a:endParaRPr lang="en-US" sz="1500" dirty="0"/>
           </a:p>
@@ -16359,7 +16359,7 @@
                 <a:ea typeface="Calibri" pitchFamily="34" charset="-122"/>
                 <a:cs typeface="Calibri" pitchFamily="34" charset="-120"/>
               </a:rPr>
-              <a:t>Deux : un avant, un après</a:t>
+              <a:t>Des 0 et des 1</a:t>
             </a:r>
             <a:endParaRPr lang="en-US" sz="3600" dirty="0"/>
           </a:p>
@@ -16501,7 +16501,7 @@
                 <a:ea typeface="Calibri" pitchFamily="34" charset="-122"/>
                 <a:cs typeface="Calibri" pitchFamily="34" charset="-120"/>
               </a:rPr>
-              <a:t>Comme une paire de chaussures : jamais un tout seul.</a:t>
+              <a:t>Souvenez-vous des huit élèves debout et assis. Debout = 1, assis = 0. Rien d'autre.</a:t>
             </a:r>
             <a:endParaRPr lang="en-US" sz="2000" dirty="0"/>
           </a:p>
@@ -16653,7 +16653,7 @@
                 <a:ea typeface="Calibri" pitchFamily="34" charset="-122"/>
                 <a:cs typeface="Calibri" pitchFamily="34" charset="-120"/>
               </a:rPr>
-              <a:t>Au fond, l'ordinateur ne comprend que…</a:t>
+              <a:t>Les huit élèves debout et assis, ils formaient quoi ?</a:t>
             </a:r>
             <a:endParaRPr lang="en-US" sz="4200" dirty="0"/>
           </a:p>
@@ -16756,7 +16756,7 @@
                 <a:ea typeface="Calibri" pitchFamily="34" charset="-122"/>
                 <a:cs typeface="Calibri" pitchFamily="34" charset="-120"/>
               </a:rPr>
-              <a:t>Le français</a:t>
+              <a:t>Un mot de passe</a:t>
             </a:r>
             <a:endParaRPr lang="en-US" sz="2300" dirty="0"/>
           </a:p>
@@ -16859,7 +16859,7 @@
                 <a:ea typeface="Calibri" pitchFamily="34" charset="-122"/>
                 <a:cs typeface="Calibri" pitchFamily="34" charset="-120"/>
               </a:rPr>
-              <a:t>L'anglais</a:t>
+              <a:t>La lettre A</a:t>
             </a:r>
             <a:endParaRPr lang="en-US" sz="2300" dirty="0"/>
           </a:p>
@@ -16962,7 +16962,7 @@
                 <a:ea typeface="Calibri" pitchFamily="34" charset="-122"/>
                 <a:cs typeface="Calibri" pitchFamily="34" charset="-120"/>
               </a:rPr>
-              <a:t>Des 0 et des 1</a:t>
+              <a:t>Un numéro de téléphone</a:t>
             </a:r>
             <a:endParaRPr lang="en-US" sz="2300" dirty="0"/>
           </a:p>
@@ -17065,7 +17065,7 @@
                 <a:ea typeface="Calibri" pitchFamily="34" charset="-122"/>
                 <a:cs typeface="Calibri" pitchFamily="34" charset="-120"/>
               </a:rPr>
-              <a:t>Des images</a:t>
+              <a:t>Rien du tout</a:t>
             </a:r>
             <a:endParaRPr lang="en-US" sz="2300" dirty="0"/>
           </a:p>
@@ -17175,7 +17175,7 @@
                 <a:ea typeface="Calibri" pitchFamily="34" charset="-122"/>
                 <a:cs typeface="Calibri" pitchFamily="34" charset="-120"/>
               </a:rPr>
-              <a:t>Au fond, l'ordinateur ne comprend que…</a:t>
+              <a:t>Les huit élèves debout et assis, ils formaient quoi ?</a:t>
             </a:r>
             <a:endParaRPr lang="en-US" sz="2200" dirty="0"/>
           </a:p>
@@ -17198,7 +17198,7 @@
             </a:avLst>
           </a:prstGeom>
           <a:solidFill>
-            <a:srgbClr val="E8871E"/>
+            <a:srgbClr val="1F6FD0"/>
           </a:solidFill>
           <a:ln/>
         </p:spPr>
@@ -17236,7 +17236,7 @@
                 <a:ea typeface="Calibri" pitchFamily="34" charset="-122"/>
                 <a:cs typeface="Calibri" pitchFamily="34" charset="-120"/>
               </a:rPr>
-              <a:t>●   ORANGE</a:t>
+              <a:t>◆   BLEU</a:t>
             </a:r>
             <a:endParaRPr lang="en-US" sz="1500" dirty="0"/>
           </a:p>
@@ -17275,7 +17275,7 @@
                 <a:ea typeface="Calibri" pitchFamily="34" charset="-122"/>
                 <a:cs typeface="Calibri" pitchFamily="34" charset="-120"/>
               </a:rPr>
-              <a:t>Des 0 et des 1</a:t>
+              <a:t>La lettre A</a:t>
             </a:r>
             <a:endParaRPr lang="en-US" sz="3600" dirty="0"/>
           </a:p>
@@ -17417,7 +17417,7 @@
                 <a:ea typeface="Calibri" pitchFamily="34" charset="-122"/>
                 <a:cs typeface="Calibri" pitchFamily="34" charset="-120"/>
               </a:rPr>
-              <a:t>Souvenez-vous des huit élèves debout et assis. Debout = 1, assis = 0. Rien d'autre.</a:t>
+              <a:t>01000001 : c'est la lettre A pour une machine. Huit cases, huit élèves.</a:t>
             </a:r>
             <a:endParaRPr lang="en-US" sz="2000" dirty="0"/>
           </a:p>
@@ -17569,7 +17569,7 @@
                 <a:ea typeface="Calibri" pitchFamily="34" charset="-122"/>
                 <a:cs typeface="Calibri" pitchFamily="34" charset="-120"/>
               </a:rPr>
-              <a:t>Quand l'ordinateur écrit en rouge, cela veut dire…</a:t>
+              <a:t>Entre Python et la machine, qui fait la traduction ?</a:t>
             </a:r>
             <a:endParaRPr lang="en-US" sz="4200" dirty="0"/>
           </a:p>
@@ -17672,7 +17672,7 @@
                 <a:ea typeface="Calibri" pitchFamily="34" charset="-122"/>
                 <a:cs typeface="Calibri" pitchFamily="34" charset="-120"/>
               </a:rPr>
-              <a:t>Il est en colère</a:t>
+              <a:t>L'interprète</a:t>
             </a:r>
             <a:endParaRPr lang="en-US" sz="2300" dirty="0"/>
           </a:p>
@@ -17767,17 +17767,17 @@
               <a:buNone/>
             </a:pPr>
             <a:r>
-              <a:rPr lang="en-US" sz="1900" b="1" dirty="0">
-                <a:solidFill>
-                  <a:srgbClr val="FFFFFF"/>
-                </a:solidFill>
-                <a:latin typeface="Calibri" pitchFamily="34" charset="0"/>
-                <a:ea typeface="Calibri" pitchFamily="34" charset="-122"/>
-                <a:cs typeface="Calibri" pitchFamily="34" charset="-120"/>
-              </a:rPr>
-              <a:t>Il t'explique ce qu'il n'a pas compris</a:t>
-            </a:r>
-            <a:endParaRPr lang="en-US" sz="1900" dirty="0"/>
+              <a:rPr lang="en-US" sz="2300" b="1" dirty="0">
+                <a:solidFill>
+                  <a:srgbClr val="FFFFFF"/>
+                </a:solidFill>
+                <a:latin typeface="Calibri" pitchFamily="34" charset="0"/>
+                <a:ea typeface="Calibri" pitchFamily="34" charset="-122"/>
+                <a:cs typeface="Calibri" pitchFamily="34" charset="-120"/>
+              </a:rPr>
+              <a:t>Le clavier</a:t>
+            </a:r>
+            <a:endParaRPr lang="en-US" sz="2300" dirty="0"/>
           </a:p>
         </p:txBody>
       </p:sp>
@@ -17878,7 +17878,7 @@
                 <a:ea typeface="Calibri" pitchFamily="34" charset="-122"/>
                 <a:cs typeface="Calibri" pitchFamily="34" charset="-120"/>
               </a:rPr>
-              <a:t>Tu es puni</a:t>
+              <a:t>Internet</a:t>
             </a:r>
             <a:endParaRPr lang="en-US" sz="2300" dirty="0"/>
           </a:p>
@@ -17981,7 +17981,7 @@
                 <a:ea typeface="Calibri" pitchFamily="34" charset="-122"/>
                 <a:cs typeface="Calibri" pitchFamily="34" charset="-120"/>
               </a:rPr>
-              <a:t>L'ordinateur est cassé</a:t>
+              <a:t>Personne</a:t>
             </a:r>
             <a:endParaRPr lang="en-US" sz="2300" dirty="0"/>
           </a:p>
@@ -18091,7 +18091,7 @@
                 <a:ea typeface="Calibri" pitchFamily="34" charset="-122"/>
                 <a:cs typeface="Calibri" pitchFamily="34" charset="-120"/>
               </a:rPr>
-              <a:t>Quand l'ordinateur écrit en rouge, cela veut dire…</a:t>
+              <a:t>Entre Python et la machine, qui fait la traduction ?</a:t>
             </a:r>
             <a:endParaRPr lang="en-US" sz="2200" dirty="0"/>
           </a:p>
@@ -18114,7 +18114,7 @@
             </a:avLst>
           </a:prstGeom>
           <a:solidFill>
-            <a:srgbClr val="1F6FD0"/>
+            <a:srgbClr val="D7262B"/>
           </a:solidFill>
           <a:ln/>
         </p:spPr>
@@ -18152,7 +18152,7 @@
                 <a:ea typeface="Calibri" pitchFamily="34" charset="-122"/>
                 <a:cs typeface="Calibri" pitchFamily="34" charset="-120"/>
               </a:rPr>
-              <a:t>◆   BLEU</a:t>
+              <a:t>▲   ROUGE</a:t>
             </a:r>
             <a:endParaRPr lang="en-US" sz="1500" dirty="0"/>
           </a:p>
@@ -18183,17 +18183,17 @@
               <a:buNone/>
             </a:pPr>
             <a:r>
-              <a:rPr lang="en-US" sz="3000" b="1" dirty="0">
-                <a:solidFill>
-                  <a:srgbClr val="FFFFFF"/>
-                </a:solidFill>
-                <a:latin typeface="Calibri" pitchFamily="34" charset="0"/>
-                <a:ea typeface="Calibri" pitchFamily="34" charset="-122"/>
-                <a:cs typeface="Calibri" pitchFamily="34" charset="-120"/>
-              </a:rPr>
-              <a:t>Il t'explique ce qu'il n'a pas compris</a:t>
-            </a:r>
-            <a:endParaRPr lang="en-US" sz="3000" dirty="0"/>
+              <a:rPr lang="en-US" sz="3600" b="1" dirty="0">
+                <a:solidFill>
+                  <a:srgbClr val="FFFFFF"/>
+                </a:solidFill>
+                <a:latin typeface="Calibri" pitchFamily="34" charset="0"/>
+                <a:ea typeface="Calibri" pitchFamily="34" charset="-122"/>
+                <a:cs typeface="Calibri" pitchFamily="34" charset="-120"/>
+              </a:rPr>
+              <a:t>L'interprète</a:t>
+            </a:r>
+            <a:endParaRPr lang="en-US" sz="3600" dirty="0"/>
           </a:p>
         </p:txBody>
       </p:sp>
@@ -18333,7 +18333,7 @@
                 <a:ea typeface="Calibri" pitchFamily="34" charset="-122"/>
                 <a:cs typeface="Calibri" pitchFamily="34" charset="-120"/>
               </a:rPr>
-              <a:t>Le rouge n'est pas grave. LE ROUGE EST UNE INFORMATION.</a:t>
+              <a:t>J'écris des mots dans Thonny, l'interprète les traduit en 0 et en 1, et la machine obéit.</a:t>
             </a:r>
             <a:endParaRPr lang="en-US" sz="2000" dirty="0"/>
           </a:p>
